--- a/content/decks/a-level-art-design/9479-intro-02-the-three-components.pptx
+++ b/content/decks/a-level-art-design/9479-intro-02-the-three-components.pptx
@@ -4158,7 +4158,7 @@
       </p:grpSpPr>
       <p:pic>
         <p:nvPicPr>
-          <p:cNvPr id="2" name="Image 0" descr="/private/tmp/claude-501/-Users-dogan-Documents-Vaults-Courses/3954bcc8-cc8d-4110-bd5a-74962061a805/scratchpad/decks/img/crops/rubens-sheet-forearm_a691.jpg">    </p:cNvPr>
+          <p:cNvPr id="2" name="Image 0" descr="/Users/dogan/Documents/Vaults/Courses/wiki/classes/a-level-art-design/decks/_build/img/crops/rubens-sheet-forearm_a691.jpg">    </p:cNvPr>
           <p:cNvPicPr>
             <a:picLocks noChangeAspect="1"/>
           </p:cNvPicPr>
@@ -4970,7 +4970,7 @@
       </p:sp>
       <p:pic>
         <p:nvPicPr>
-          <p:cNvPr id="7" name="Image 0" descr="/private/tmp/claude-501/-Users-dogan-Documents-Vaults-Courses/3954bcc8-cc8d-4110-bd5a-74962061a805/scratchpad/decks/img/rubens-three-figures.jpg">    </p:cNvPr>
+          <p:cNvPr id="7" name="Image 0" descr="/Users/dogan/Documents/Vaults/Courses/wiki/classes/a-level-art-design/decks/_build/img/rubens-three-figures.jpg">    </p:cNvPr>
           <p:cNvPicPr>
             <a:picLocks noChangeAspect="1"/>
           </p:cNvPicPr>
@@ -5097,7 +5097,7 @@
       </p:sp>
       <p:pic>
         <p:nvPicPr>
-          <p:cNvPr id="11" name="Image 1" descr="/private/tmp/claude-501/-Users-dogan-Documents-Vaults-Courses/3954bcc8-cc8d-4110-bd5a-74962061a805/scratchpad/decks/img/repin-naked-sketch.jpg">    </p:cNvPr>
+          <p:cNvPr id="11" name="Image 1" descr="/Users/dogan/Documents/Vaults/Courses/wiki/classes/a-level-art-design/decks/_build/img/repin-cafe-studies.jpg">    </p:cNvPr>
           <p:cNvPicPr>
             <a:picLocks noChangeAspect="1"/>
           </p:cNvPicPr>
@@ -5111,8 +5111,8 @@
         </p:blipFill>
         <p:spPr>
           <a:xfrm>
-            <a:off x="5141020" y="1728216"/>
-            <a:ext cx="1906911" cy="2944368"/>
+            <a:off x="4587240" y="2077066"/>
+            <a:ext cx="3014472" cy="2246668"/>
           </a:xfrm>
           <a:prstGeom prst="rect">
             <a:avLst/>
@@ -5224,7 +5224,7 @@
       </p:sp>
       <p:pic>
         <p:nvPicPr>
-          <p:cNvPr id="15" name="Image 2" descr="/private/tmp/claude-501/-Users-dogan-Documents-Vaults-Courses/3954bcc8-cc8d-4110-bd5a-74962061a805/scratchpad/decks/img/repin-stoking-fire.jpg">    </p:cNvPr>
+          <p:cNvPr id="15" name="Image 2" descr="/Users/dogan/Documents/Vaults/Courses/wiki/classes/a-level-art-design/decks/_build/img/repin-stoking-fire.jpg">    </p:cNvPr>
           <p:cNvPicPr>
             <a:picLocks noChangeAspect="1"/>
           </p:cNvPicPr>
@@ -5498,7 +5498,7 @@
       </p:grpSpPr>
       <p:pic>
         <p:nvPicPr>
-          <p:cNvPr id="2" name="Image 0" descr="/private/tmp/claude-501/-Users-dogan-Documents-Vaults-Courses/3954bcc8-cc8d-4110-bd5a-74962061a805/scratchpad/decks/img/crops/cameron-carlyle_a691.jpg">    </p:cNvPr>
+          <p:cNvPr id="2" name="Image 0" descr="/Users/dogan/Documents/Vaults/Courses/wiki/classes/a-level-art-design/decks/_build/img/crops/cameron-carlyle_a691.jpg">    </p:cNvPr>
           <p:cNvPicPr>
             <a:picLocks noChangeAspect="1"/>
           </p:cNvPicPr>
@@ -6750,7 +6750,7 @@
       </p:grpSpPr>
       <p:pic>
         <p:nvPicPr>
-          <p:cNvPr id="2" name="Image 0" descr="/private/tmp/claude-501/-Users-dogan-Documents-Vaults-Courses/3954bcc8-cc8d-4110-bd5a-74962061a805/scratchpad/decks/img/crops/bosschaert-bouquet_a691.jpg">    </p:cNvPr>
+          <p:cNvPr id="2" name="Image 0" descr="/Users/dogan/Documents/Vaults/Courses/wiki/classes/a-level-art-design/decks/_build/img/crops/bosschaert-bouquet_a691.jpg">    </p:cNvPr>
           <p:cNvPicPr>
             <a:picLocks noChangeAspect="1"/>
           </p:cNvPicPr>
